--- a/ebook-Java-Bushido.pptx
+++ b/ebook-Java-Bushido.pptx
@@ -8278,7 +8278,7 @@
         <p:spPr>
           <a:xfrm>
             <a:off x="476249" y="2800000"/>
-            <a:ext cx="8635092" cy="6178999"/>
+            <a:ext cx="8635092" cy="7194662"/>
           </a:xfrm>
           <a:prstGeom prst="rect">
             <a:avLst/>
@@ -8600,6 +8600,42 @@
               <a:t> Honra no Código</a:t>
             </a:r>
             <a:endParaRPr lang="pt-BR" sz="2200" dirty="0">
+              <a:solidFill>
+                <a:srgbClr val="121212"/>
+              </a:solidFill>
+              <a:latin typeface="Calibri Light" panose="020F0302020204030204" pitchFamily="34" charset="0"/>
+            </a:endParaRPr>
+          </a:p>
+          <a:p>
+            <a:pPr>
+              <a:lnSpc>
+                <a:spcPct val="150000"/>
+              </a:lnSpc>
+            </a:pPr>
+            <a:endParaRPr lang="pt-BR" sz="2200" dirty="0">
+              <a:solidFill>
+                <a:srgbClr val="121212"/>
+              </a:solidFill>
+              <a:latin typeface="Calibri Light" panose="020F0302020204030204" pitchFamily="34" charset="0"/>
+            </a:endParaRPr>
+          </a:p>
+          <a:p>
+            <a:pPr>
+              <a:lnSpc>
+                <a:spcPct val="150000"/>
+              </a:lnSpc>
+            </a:pPr>
+            <a:r>
+              <a:rPr lang="pt-BR" sz="2200" b="1" dirty="0">
+                <a:solidFill>
+                  <a:srgbClr val="121212"/>
+                </a:solidFill>
+                <a:latin typeface="Calibri Light" panose="020F0302020204030204" pitchFamily="34" charset="0"/>
+                <a:hlinkClick r:id="rId11"/>
+              </a:rPr>
+              <a:t>Códigos de exemplo no GitHub</a:t>
+            </a:r>
+            <a:endParaRPr lang="pt-BR" sz="2200" b="1" dirty="0">
               <a:solidFill>
                 <a:srgbClr val="121212"/>
               </a:solidFill>

--- a/ebook-Java-Bushido.pptx
+++ b/ebook-Java-Bushido.pptx
@@ -3606,11 +3606,9 @@
           <a:gradFill flip="none" rotWithShape="1">
             <a:gsLst>
               <a:gs pos="100000">
-                <a:schemeClr val="accent1">
-                  <a:lumMod val="5000"/>
-                  <a:lumOff val="95000"/>
+                <a:srgbClr val="FF0000">
                   <a:alpha val="0"/>
-                </a:schemeClr>
+                </a:srgbClr>
               </a:gs>
               <a:gs pos="41000">
                 <a:srgbClr val="B71C1C"/>
@@ -13643,41 +13641,14 @@
       </p:sp>
       <p:sp>
         <p:nvSpPr>
-          <p:cNvPr id="5" name="Título 4">
-            <a:extLst>
-              <a:ext uri="{FF2B5EF4-FFF2-40B4-BE49-F238E27FC236}">
-                <a16:creationId xmlns:a16="http://schemas.microsoft.com/office/drawing/2014/main" id="{58EF1037-F48F-5F12-1BBC-38AA4665FCB2}"/>
-              </a:ext>
-              <a:ext uri="{C183D7F6-B498-43B3-948B-1728B52AA6E4}">
-                <adec:decorative xmlns:adec="http://schemas.microsoft.com/office/drawing/2017/decorative" val="1"/>
-              </a:ext>
-            </a:extLst>
-          </p:cNvPr>
-          <p:cNvSpPr>
+          <p:cNvPr id="3" name="Title"/>
+          <p:cNvSpPr txBox="1">
             <a:spLocks noGrp="1"/>
           </p:cNvSpPr>
           <p:nvPr>
             <p:ph type="title" idx="4294967295"/>
           </p:nvPr>
         </p:nvSpPr>
-        <p:spPr/>
-        <p:txBody>
-          <a:bodyPr/>
-          <a:lstStyle/>
-          <a:p>
-            <a:r>
-              <a:rPr lang="pt-BR" dirty="0"/>
-              <a:t>Prefácio</a:t>
-            </a:r>
-          </a:p>
-        </p:txBody>
-      </p:sp>
-      <p:sp>
-        <p:nvSpPr>
-          <p:cNvPr id="3" name="Title"/>
-          <p:cNvSpPr txBox="1"/>
-          <p:nvPr/>
-        </p:nvSpPr>
         <p:spPr>
           <a:xfrm>
             <a:off x="489857" y="4500000"/>
@@ -13687,32 +13658,88 @@
             <a:avLst/>
           </a:prstGeom>
           <a:noFill/>
-        </p:spPr>
-        <p:txBody>
-          <a:bodyPr wrap="square" rtlCol="0">
+          <a:ln>
+            <a:noFill/>
+            <a:prstDash/>
+          </a:ln>
+          <a:effectLst/>
+        </p:spPr>
+        <p:txBody>
+          <a:bodyPr rot="0" spcFirstLastPara="0" vertOverflow="overflow" horzOverflow="overflow" vert="horz" wrap="square" lIns="91440" tIns="45720" rIns="91440" bIns="45720" numCol="1" spcCol="0" rtlCol="0" fromWordArt="0" anchor="t" anchorCtr="0" forceAA="0" compatLnSpc="1">
+            <a:prstTxWarp prst="textNoShape">
+              <a:avLst/>
+            </a:prstTxWarp>
             <a:spAutoFit/>
           </a:bodyPr>
           <a:lstStyle/>
           <a:p>
-            <a:pPr algn="ctr"/>
-            <a:r>
-              <a:rPr lang="pt-BR" sz="5400" dirty="0">
+            <a:pPr marL="0" marR="0" lvl="0" indent="0" algn="ctr" defTabSz="457200" rtl="0" eaLnBrk="1" fontAlgn="auto" latinLnBrk="0" hangingPunct="1">
+              <a:lnSpc>
+                <a:spcPct val="100000"/>
+              </a:lnSpc>
+              <a:spcBef>
+                <a:spcPts val="0"/>
+              </a:spcBef>
+              <a:spcAft>
+                <a:spcPts val="0"/>
+              </a:spcAft>
+              <a:buClrTx/>
+              <a:buSzTx/>
+              <a:buFontTx/>
+              <a:buNone/>
+              <a:tabLst/>
+              <a:defRPr/>
+            </a:pPr>
+            <a:r>
+              <a:rPr kumimoji="0" lang="pt-BR" sz="5400" b="0" i="0" u="none" strike="noStrike" kern="1200" cap="none" spc="0" normalizeH="0" baseline="0" noProof="0" dirty="0">
+                <a:ln>
+                  <a:noFill/>
+                </a:ln>
                 <a:solidFill>
                   <a:srgbClr val="FFFFFF"/>
                 </a:solidFill>
+                <a:effectLst/>
+                <a:uLnTx/>
+                <a:uFillTx/>
                 <a:latin typeface="Arial Black" panose="020B0A04020102020204" pitchFamily="34" charset="0"/>
+                <a:ea typeface="+mn-ea"/>
+                <a:cs typeface="+mn-cs"/>
               </a:rPr>
               <a:t>PREFÁCIO</a:t>
             </a:r>
           </a:p>
           <a:p>
-            <a:pPr algn="ctr"/>
-            <a:r>
-              <a:rPr lang="pt-BR" sz="5400" dirty="0">
+            <a:pPr marL="0" marR="0" lvl="0" indent="0" algn="ctr" defTabSz="457200" rtl="0" eaLnBrk="1" fontAlgn="auto" latinLnBrk="0" hangingPunct="1">
+              <a:lnSpc>
+                <a:spcPct val="100000"/>
+              </a:lnSpc>
+              <a:spcBef>
+                <a:spcPts val="0"/>
+              </a:spcBef>
+              <a:spcAft>
+                <a:spcPts val="0"/>
+              </a:spcAft>
+              <a:buClrTx/>
+              <a:buSzTx/>
+              <a:buFontTx/>
+              <a:buNone/>
+              <a:tabLst/>
+              <a:defRPr/>
+            </a:pPr>
+            <a:r>
+              <a:rPr kumimoji="0" lang="pt-BR" sz="5400" b="0" i="0" u="none" strike="noStrike" kern="1200" cap="none" spc="0" normalizeH="0" baseline="0" noProof="0" dirty="0">
+                <a:ln>
+                  <a:noFill/>
+                </a:ln>
                 <a:solidFill>
                   <a:srgbClr val="FFFFFF"/>
                 </a:solidFill>
+                <a:effectLst/>
+                <a:uLnTx/>
+                <a:uFillTx/>
                 <a:latin typeface="Arial Black" panose="020B0A04020102020204" pitchFamily="34" charset="0"/>
+                <a:ea typeface="+mn-ea"/>
+                <a:cs typeface="+mn-cs"/>
               </a:rPr>
               <a:t>
 O CÓDIGO COMO CAMINHO</a:t>
